--- a/FBS_Presentation.pptx
+++ b/FBS_Presentation.pptx
@@ -5,7 +5,7 @@
     <p:sldMasterId id="2147483725" r:id="rId1"/>
   </p:sldMasterIdLst>
   <p:notesMasterIdLst>
-    <p:notesMasterId r:id="rId11"/>
+    <p:notesMasterId r:id="rId12"/>
   </p:notesMasterIdLst>
   <p:sldIdLst>
     <p:sldId id="256" r:id="rId2"/>
@@ -13,10 +13,11 @@
     <p:sldId id="269" r:id="rId4"/>
     <p:sldId id="270" r:id="rId5"/>
     <p:sldId id="267" r:id="rId6"/>
-    <p:sldId id="273" r:id="rId7"/>
-    <p:sldId id="259" r:id="rId8"/>
-    <p:sldId id="268" r:id="rId9"/>
-    <p:sldId id="274" r:id="rId10"/>
+    <p:sldId id="275" r:id="rId7"/>
+    <p:sldId id="273" r:id="rId8"/>
+    <p:sldId id="259" r:id="rId9"/>
+    <p:sldId id="268" r:id="rId10"/>
+    <p:sldId id="274" r:id="rId11"/>
   </p:sldIdLst>
   <p:sldSz cx="12192000" cy="6858000"/>
   <p:notesSz cx="6858000" cy="9144000"/>
@@ -3407,7 +3408,7 @@
         <a:lstStyle/>
         <a:p>
           <a:r>
-            <a:rPr lang="en-US"/>
+            <a:rPr lang="en-US" dirty="0"/>
             <a:t>Centralized system</a:t>
           </a:r>
         </a:p>
@@ -5246,7 +5247,7 @@
             <a:buNone/>
           </a:pPr>
           <a:r>
-            <a:rPr lang="en-US" sz="2900" kern="1200"/>
+            <a:rPr lang="en-US" sz="2900" kern="1200" dirty="0"/>
             <a:t>Centralized system</a:t>
           </a:r>
         </a:p>
@@ -9794,7 +9795,7 @@
           <a:p>
             <a:fld id="{15A4E4F3-A2B9-4579-AB69-941DDD329CB0}" type="datetimeFigureOut">
               <a:rPr lang="en-US" smtClean="0"/>
-              <a:t>4/22/26</a:t>
+              <a:t>4/23/26</a:t>
             </a:fld>
             <a:endParaRPr lang="en-US"/>
           </a:p>
@@ -10664,28 +10665,7 @@
           <a:bodyPr/>
           <a:lstStyle/>
           <a:p>
-            <a:r>
-              <a:rPr lang="en-US" dirty="0"/>
-              <a:t>1. Layered architecture – separated by 4 layers where each layer has its specific responsibility</a:t>
-            </a:r>
-          </a:p>
-          <a:p>
-            <a:r>
-              <a:rPr lang="en-US" dirty="0"/>
-              <a:t>2. Role based access – users are assigned roles where system checks the user’s role and provides specific features.</a:t>
-            </a:r>
-          </a:p>
-          <a:p>
-            <a:r>
-              <a:rPr lang="en-US" dirty="0"/>
-              <a:t>3. Centralized system – booking and flight management is handled by one system. </a:t>
-            </a:r>
-          </a:p>
-          <a:p>
-            <a:r>
-              <a:rPr lang="en-US" dirty="0"/>
-              <a:t>4. OOP-based design – system is design using object-oriented principles.</a:t>
-            </a:r>
+            <a:endParaRPr lang="en-US" dirty="0"/>
           </a:p>
         </p:txBody>
       </p:sp>
@@ -10715,7 +10695,7 @@
     </p:spTree>
     <p:extLst>
       <p:ext uri="{BB962C8B-B14F-4D97-AF65-F5344CB8AC3E}">
-        <p14:creationId xmlns:p14="http://schemas.microsoft.com/office/powerpoint/2010/main" val="3741747240"/>
+        <p14:creationId xmlns:p14="http://schemas.microsoft.com/office/powerpoint/2010/main" val="674591184"/>
       </p:ext>
     </p:extLst>
   </p:cSld>
@@ -10771,25 +10751,25 @@
           <a:p>
             <a:r>
               <a:rPr lang="en-US" dirty="0"/>
-              <a:t>Model Layer – Data &amp; Behaviors</a:t>
+              <a:t>1. Layered architecture – separated by 4 layers where each layer has its specific responsibility</a:t>
             </a:r>
           </a:p>
           <a:p>
             <a:r>
               <a:rPr lang="en-US" dirty="0"/>
-              <a:t>Repository Layer – Persistence </a:t>
+              <a:t>2. Role based access – users are assigned roles where system checks the user’s role and provides specific features.</a:t>
             </a:r>
           </a:p>
           <a:p>
             <a:r>
               <a:rPr lang="en-US" dirty="0"/>
-              <a:t>Service Layer – Business Rules</a:t>
+              <a:t>3. Centralized system – booking and flight management is handled by one system. </a:t>
             </a:r>
           </a:p>
           <a:p>
             <a:r>
               <a:rPr lang="en-US" dirty="0"/>
-              <a:t>UI Layer – User Interaction</a:t>
+              <a:t>4. OOP-based design – system is design using object-oriented principles.</a:t>
             </a:r>
           </a:p>
         </p:txBody>
@@ -10820,7 +10800,7 @@
     </p:spTree>
     <p:extLst>
       <p:ext uri="{BB962C8B-B14F-4D97-AF65-F5344CB8AC3E}">
-        <p14:creationId xmlns:p14="http://schemas.microsoft.com/office/powerpoint/2010/main" val="1744302487"/>
+        <p14:creationId xmlns:p14="http://schemas.microsoft.com/office/powerpoint/2010/main" val="3741747240"/>
       </p:ext>
     </p:extLst>
   </p:cSld>
@@ -10874,7 +10854,28 @@
           <a:bodyPr/>
           <a:lstStyle/>
           <a:p>
-            <a:endParaRPr lang="en-US" dirty="0"/>
+            <a:r>
+              <a:rPr lang="en-US" dirty="0"/>
+              <a:t>Model Layer – Data &amp; Behaviors</a:t>
+            </a:r>
+          </a:p>
+          <a:p>
+            <a:r>
+              <a:rPr lang="en-US" dirty="0"/>
+              <a:t>Repository Layer – Persistence </a:t>
+            </a:r>
+          </a:p>
+          <a:p>
+            <a:r>
+              <a:rPr lang="en-US" dirty="0"/>
+              <a:t>Service Layer – Business Rules</a:t>
+            </a:r>
+          </a:p>
+          <a:p>
+            <a:r>
+              <a:rPr lang="en-US" dirty="0"/>
+              <a:t>UI Layer – User Interaction</a:t>
+            </a:r>
           </a:p>
         </p:txBody>
       </p:sp>
@@ -10896,6 +10897,90 @@
             <a:fld id="{578BB5DA-648A-49CD-AB20-0ACE11447332}" type="slidenum">
               <a:rPr lang="en-US" smtClean="0"/>
               <a:t>8</a:t>
+            </a:fld>
+            <a:endParaRPr lang="en-US"/>
+          </a:p>
+        </p:txBody>
+      </p:sp>
+    </p:spTree>
+    <p:extLst>
+      <p:ext uri="{BB962C8B-B14F-4D97-AF65-F5344CB8AC3E}">
+        <p14:creationId xmlns:p14="http://schemas.microsoft.com/office/powerpoint/2010/main" val="1744302487"/>
+      </p:ext>
+    </p:extLst>
+  </p:cSld>
+  <p:clrMapOvr>
+    <a:masterClrMapping/>
+  </p:clrMapOvr>
+</p:notes>
+</file>
+
+<file path=ppt/notesSlides/notesSlide9.xml><?xml version="1.0" encoding="utf-8"?>
+<p:notes xmlns:a="http://schemas.openxmlformats.org/drawingml/2006/main" xmlns:r="http://schemas.openxmlformats.org/officeDocument/2006/relationships" xmlns:p="http://schemas.openxmlformats.org/presentationml/2006/main">
+  <p:cSld>
+    <p:spTree>
+      <p:nvGrpSpPr>
+        <p:cNvPr id="1" name=""/>
+        <p:cNvGrpSpPr/>
+        <p:nvPr/>
+      </p:nvGrpSpPr>
+      <p:grpSpPr>
+        <a:xfrm>
+          <a:off x="0" y="0"/>
+          <a:ext cx="0" cy="0"/>
+          <a:chOff x="0" y="0"/>
+          <a:chExt cx="0" cy="0"/>
+        </a:xfrm>
+      </p:grpSpPr>
+      <p:sp>
+        <p:nvSpPr>
+          <p:cNvPr id="2" name="Slide Image Placeholder 1"/>
+          <p:cNvSpPr>
+            <a:spLocks noGrp="1" noRot="1" noChangeAspect="1"/>
+          </p:cNvSpPr>
+          <p:nvPr>
+            <p:ph type="sldImg"/>
+          </p:nvPr>
+        </p:nvSpPr>
+        <p:spPr/>
+      </p:sp>
+      <p:sp>
+        <p:nvSpPr>
+          <p:cNvPr id="3" name="Notes Placeholder 2"/>
+          <p:cNvSpPr>
+            <a:spLocks noGrp="1"/>
+          </p:cNvSpPr>
+          <p:nvPr>
+            <p:ph type="body" idx="1"/>
+          </p:nvPr>
+        </p:nvSpPr>
+        <p:spPr/>
+        <p:txBody>
+          <a:bodyPr/>
+          <a:lstStyle/>
+          <a:p>
+            <a:endParaRPr lang="en-US" dirty="0"/>
+          </a:p>
+        </p:txBody>
+      </p:sp>
+      <p:sp>
+        <p:nvSpPr>
+          <p:cNvPr id="4" name="Slide Number Placeholder 3"/>
+          <p:cNvSpPr>
+            <a:spLocks noGrp="1"/>
+          </p:cNvSpPr>
+          <p:nvPr>
+            <p:ph type="sldNum" sz="quarter" idx="5"/>
+          </p:nvPr>
+        </p:nvSpPr>
+        <p:spPr/>
+        <p:txBody>
+          <a:bodyPr/>
+          <a:lstStyle/>
+          <a:p>
+            <a:fld id="{578BB5DA-648A-49CD-AB20-0ACE11447332}" type="slidenum">
+              <a:rPr lang="en-US" smtClean="0"/>
+              <a:t>9</a:t>
             </a:fld>
             <a:endParaRPr lang="en-US"/>
           </a:p>
@@ -11197,7 +11282,7 @@
           <a:p>
             <a:fld id="{E80C50CD-E178-4744-9B35-B2F624D6C5E9}" type="datetimeFigureOut">
               <a:rPr lang="en-US" smtClean="0"/>
-              <a:t>4/22/26</a:t>
+              <a:t>4/23/26</a:t>
             </a:fld>
             <a:endParaRPr lang="en-US"/>
           </a:p>
@@ -11395,7 +11480,7 @@
           <a:p>
             <a:fld id="{E80C50CD-E178-4744-9B35-B2F624D6C5E9}" type="datetimeFigureOut">
               <a:rPr lang="en-US" smtClean="0"/>
-              <a:t>4/22/26</a:t>
+              <a:t>4/23/26</a:t>
             </a:fld>
             <a:endParaRPr lang="en-US"/>
           </a:p>
@@ -11603,7 +11688,7 @@
           <a:p>
             <a:fld id="{E80C50CD-E178-4744-9B35-B2F624D6C5E9}" type="datetimeFigureOut">
               <a:rPr lang="en-US" smtClean="0"/>
-              <a:t>4/22/26</a:t>
+              <a:t>4/23/26</a:t>
             </a:fld>
             <a:endParaRPr lang="en-US"/>
           </a:p>
@@ -11853,7 +11938,7 @@
           <a:p>
             <a:fld id="{E80C50CD-E178-4744-9B35-B2F624D6C5E9}" type="datetimeFigureOut">
               <a:rPr lang="en-US" smtClean="0"/>
-              <a:t>4/22/26</a:t>
+              <a:t>4/23/26</a:t>
             </a:fld>
             <a:endParaRPr lang="en-US"/>
           </a:p>
@@ -12132,7 +12217,7 @@
           <a:p>
             <a:fld id="{E80C50CD-E178-4744-9B35-B2F624D6C5E9}" type="datetimeFigureOut">
               <a:rPr lang="en-US" smtClean="0"/>
-              <a:t>4/22/26</a:t>
+              <a:t>4/23/26</a:t>
             </a:fld>
             <a:endParaRPr lang="en-US"/>
           </a:p>
@@ -12449,7 +12534,7 @@
           <a:p>
             <a:fld id="{E80C50CD-E178-4744-9B35-B2F624D6C5E9}" type="datetimeFigureOut">
               <a:rPr lang="en-US" smtClean="0"/>
-              <a:t>4/22/26</a:t>
+              <a:t>4/23/26</a:t>
             </a:fld>
             <a:endParaRPr lang="en-US"/>
           </a:p>
@@ -12865,7 +12950,7 @@
           <a:p>
             <a:fld id="{E80C50CD-E178-4744-9B35-B2F624D6C5E9}" type="datetimeFigureOut">
               <a:rPr lang="en-US" smtClean="0"/>
-              <a:t>4/22/26</a:t>
+              <a:t>4/23/26</a:t>
             </a:fld>
             <a:endParaRPr lang="en-US"/>
           </a:p>
@@ -13006,7 +13091,7 @@
           <a:p>
             <a:fld id="{E80C50CD-E178-4744-9B35-B2F624D6C5E9}" type="datetimeFigureOut">
               <a:rPr lang="en-US" smtClean="0"/>
-              <a:t>4/22/26</a:t>
+              <a:t>4/23/26</a:t>
             </a:fld>
             <a:endParaRPr lang="en-US"/>
           </a:p>
@@ -13119,7 +13204,7 @@
           <a:p>
             <a:fld id="{E80C50CD-E178-4744-9B35-B2F624D6C5E9}" type="datetimeFigureOut">
               <a:rPr lang="en-US" smtClean="0"/>
-              <a:t>4/22/26</a:t>
+              <a:t>4/23/26</a:t>
             </a:fld>
             <a:endParaRPr lang="en-US"/>
           </a:p>
@@ -13436,7 +13521,7 @@
           <a:p>
             <a:fld id="{E80C50CD-E178-4744-9B35-B2F624D6C5E9}" type="datetimeFigureOut">
               <a:rPr lang="en-US" smtClean="0"/>
-              <a:t>4/22/26</a:t>
+              <a:t>4/23/26</a:t>
             </a:fld>
             <a:endParaRPr lang="en-US"/>
           </a:p>
@@ -13728,7 +13813,7 @@
           <a:p>
             <a:fld id="{E80C50CD-E178-4744-9B35-B2F624D6C5E9}" type="datetimeFigureOut">
               <a:rPr lang="en-US" smtClean="0"/>
-              <a:t>4/22/26</a:t>
+              <a:t>4/23/26</a:t>
             </a:fld>
             <a:endParaRPr lang="en-US"/>
           </a:p>
@@ -13968,7 +14053,7 @@
             <a:fld id="{E80C50CD-E178-4744-9B35-B2F624D6C5E9}" type="datetimeFigureOut">
               <a:rPr lang="en-US" smtClean="0"/>
               <a:pPr/>
-              <a:t>4/22/26</a:t>
+              <a:t>4/23/26</a:t>
             </a:fld>
             <a:endParaRPr lang="en-US"/>
           </a:p>
@@ -14935,6 +15020,119 @@
 </p:sld>
 </file>
 
+<file path=ppt/slides/slide10.xml><?xml version="1.0" encoding="utf-8"?>
+<p:sld xmlns:a="http://schemas.openxmlformats.org/drawingml/2006/main" xmlns:r="http://schemas.openxmlformats.org/officeDocument/2006/relationships" xmlns:p="http://schemas.openxmlformats.org/presentationml/2006/main">
+  <p:cSld>
+    <p:spTree>
+      <p:nvGrpSpPr>
+        <p:cNvPr id="1" name=""/>
+        <p:cNvGrpSpPr/>
+        <p:nvPr/>
+      </p:nvGrpSpPr>
+      <p:grpSpPr>
+        <a:xfrm>
+          <a:off x="0" y="0"/>
+          <a:ext cx="0" cy="0"/>
+          <a:chOff x="0" y="0"/>
+          <a:chExt cx="0" cy="0"/>
+        </a:xfrm>
+      </p:grpSpPr>
+      <p:sp>
+        <p:nvSpPr>
+          <p:cNvPr id="2" name="Title 1">
+            <a:extLst>
+              <a:ext uri="{FF2B5EF4-FFF2-40B4-BE49-F238E27FC236}">
+                <a16:creationId xmlns:a16="http://schemas.microsoft.com/office/drawing/2014/main" id="{B29A5194-BDC9-0D50-0D4E-2151E9E71FC9}"/>
+              </a:ext>
+            </a:extLst>
+          </p:cNvPr>
+          <p:cNvSpPr>
+            <a:spLocks noGrp="1"/>
+          </p:cNvSpPr>
+          <p:nvPr>
+            <p:ph type="title"/>
+          </p:nvPr>
+        </p:nvSpPr>
+        <p:spPr/>
+        <p:txBody>
+          <a:bodyPr/>
+          <a:lstStyle/>
+          <a:p>
+            <a:r>
+              <a:rPr lang="en-US" dirty="0"/>
+              <a:t>Next Phase</a:t>
+            </a:r>
+          </a:p>
+        </p:txBody>
+      </p:sp>
+      <p:sp>
+        <p:nvSpPr>
+          <p:cNvPr id="3" name="Content Placeholder 2">
+            <a:extLst>
+              <a:ext uri="{FF2B5EF4-FFF2-40B4-BE49-F238E27FC236}">
+                <a16:creationId xmlns:a16="http://schemas.microsoft.com/office/drawing/2014/main" id="{6315E1F8-5F77-09B3-2639-1A827A3C790F}"/>
+              </a:ext>
+            </a:extLst>
+          </p:cNvPr>
+          <p:cNvSpPr>
+            <a:spLocks noGrp="1"/>
+          </p:cNvSpPr>
+          <p:nvPr>
+            <p:ph idx="1"/>
+          </p:nvPr>
+        </p:nvSpPr>
+        <p:spPr/>
+        <p:txBody>
+          <a:bodyPr/>
+          <a:lstStyle/>
+          <a:p>
+            <a:r>
+              <a:rPr lang="en-US" dirty="0"/>
+              <a:t>Fully functional flight booking system implementing all business rules</a:t>
+            </a:r>
+          </a:p>
+          <a:p>
+            <a:r>
+              <a:rPr lang="en-US" dirty="0"/>
+              <a:t>Add some users such as (Front Desk Staff, Loyal Customer, Flight Manager)</a:t>
+            </a:r>
+          </a:p>
+          <a:p>
+            <a:r>
+              <a:rPr lang="en-US" dirty="0"/>
+              <a:t>Database</a:t>
+            </a:r>
+          </a:p>
+          <a:p>
+            <a:r>
+              <a:rPr lang="en-US" dirty="0"/>
+              <a:t>Ticket Generator</a:t>
+            </a:r>
+          </a:p>
+          <a:p>
+            <a:r>
+              <a:rPr lang="en-US" dirty="0"/>
+              <a:t>Payment Processing Simulation</a:t>
+            </a:r>
+          </a:p>
+          <a:p>
+            <a:endParaRPr lang="en-US" dirty="0"/>
+          </a:p>
+        </p:txBody>
+      </p:sp>
+    </p:spTree>
+    <p:extLst>
+      <p:ext uri="{BB962C8B-B14F-4D97-AF65-F5344CB8AC3E}">
+        <p14:creationId xmlns:p14="http://schemas.microsoft.com/office/powerpoint/2010/main" val="1331980665"/>
+      </p:ext>
+    </p:extLst>
+  </p:cSld>
+  <p:clrMapOvr>
+    <a:masterClrMapping/>
+  </p:clrMapOvr>
+</p:sld>
+</file>
+
 <file path=ppt/slides/slide2.xml><?xml version="1.0" encoding="utf-8"?>
 <p:sld xmlns:a="http://schemas.openxmlformats.org/drawingml/2006/main" xmlns:r="http://schemas.openxmlformats.org/officeDocument/2006/relationships" xmlns:p="http://schemas.openxmlformats.org/presentationml/2006/main">
   <p:cSld>
@@ -16078,6 +16276,109 @@
 <file path=ppt/slides/slide6.xml><?xml version="1.0" encoding="utf-8"?>
 <p:sld xmlns:a="http://schemas.openxmlformats.org/drawingml/2006/main" xmlns:r="http://schemas.openxmlformats.org/officeDocument/2006/relationships" xmlns:p="http://schemas.openxmlformats.org/presentationml/2006/main">
   <p:cSld>
+    <p:spTree>
+      <p:nvGrpSpPr>
+        <p:cNvPr id="1" name=""/>
+        <p:cNvGrpSpPr/>
+        <p:nvPr/>
+      </p:nvGrpSpPr>
+      <p:grpSpPr>
+        <a:xfrm>
+          <a:off x="0" y="0"/>
+          <a:ext cx="0" cy="0"/>
+          <a:chOff x="0" y="0"/>
+          <a:chExt cx="0" cy="0"/>
+        </a:xfrm>
+      </p:grpSpPr>
+      <p:pic>
+        <p:nvPicPr>
+          <p:cNvPr id="5" name="Content Placeholder 4" descr="A diagram of flight information&#10;&#10;AI-generated content may be incorrect.">
+            <a:extLst>
+              <a:ext uri="{FF2B5EF4-FFF2-40B4-BE49-F238E27FC236}">
+                <a16:creationId xmlns:a16="http://schemas.microsoft.com/office/drawing/2014/main" id="{C8BDE331-DBC5-1FA1-1906-9A7EF90FCE4F}"/>
+              </a:ext>
+            </a:extLst>
+          </p:cNvPr>
+          <p:cNvPicPr>
+            <a:picLocks noGrp="1" noChangeAspect="1"/>
+          </p:cNvPicPr>
+          <p:nvPr>
+            <p:ph idx="1"/>
+          </p:nvPr>
+        </p:nvPicPr>
+        <p:blipFill>
+          <a:blip r:embed="rId3">
+            <a:extLst>
+              <a:ext uri="{28A0092B-C50C-407E-A947-70E740481C1C}">
+                <a14:useLocalDpi xmlns:a14="http://schemas.microsoft.com/office/drawing/2010/main" val="0"/>
+              </a:ext>
+            </a:extLst>
+          </a:blip>
+          <a:stretch>
+            <a:fillRect/>
+          </a:stretch>
+        </p:blipFill>
+        <p:spPr>
+          <a:xfrm>
+            <a:off x="2776907" y="1709928"/>
+            <a:ext cx="6638185" cy="4645384"/>
+          </a:xfrm>
+          <a:prstGeom prst="rect">
+            <a:avLst/>
+          </a:prstGeom>
+        </p:spPr>
+      </p:pic>
+      <p:sp>
+        <p:nvSpPr>
+          <p:cNvPr id="6" name="Title 1">
+            <a:extLst>
+              <a:ext uri="{FF2B5EF4-FFF2-40B4-BE49-F238E27FC236}">
+                <a16:creationId xmlns:a16="http://schemas.microsoft.com/office/drawing/2014/main" id="{AFABE77B-0FD6-72E5-0FB7-37908D0A46F6}"/>
+              </a:ext>
+            </a:extLst>
+          </p:cNvPr>
+          <p:cNvSpPr>
+            <a:spLocks noGrp="1"/>
+          </p:cNvSpPr>
+          <p:nvPr>
+            <p:ph type="title"/>
+          </p:nvPr>
+        </p:nvSpPr>
+        <p:spPr>
+          <a:xfrm>
+            <a:off x="518160" y="978408"/>
+            <a:ext cx="11155680" cy="1463040"/>
+          </a:xfrm>
+        </p:spPr>
+        <p:txBody>
+          <a:bodyPr>
+            <a:normAutofit/>
+          </a:bodyPr>
+          <a:lstStyle/>
+          <a:p>
+            <a:r>
+              <a:rPr lang="en-US" dirty="0"/>
+              <a:t>Use Case Diagram</a:t>
+            </a:r>
+          </a:p>
+        </p:txBody>
+      </p:sp>
+    </p:spTree>
+    <p:extLst>
+      <p:ext uri="{BB962C8B-B14F-4D97-AF65-F5344CB8AC3E}">
+        <p14:creationId xmlns:p14="http://schemas.microsoft.com/office/powerpoint/2010/main" val="3364925133"/>
+      </p:ext>
+    </p:extLst>
+  </p:cSld>
+  <p:clrMapOvr>
+    <a:masterClrMapping/>
+  </p:clrMapOvr>
+</p:sld>
+</file>
+
+<file path=ppt/slides/slide7.xml><?xml version="1.0" encoding="utf-8"?>
+<p:sld xmlns:a="http://schemas.openxmlformats.org/drawingml/2006/main" xmlns:r="http://schemas.openxmlformats.org/officeDocument/2006/relationships" xmlns:p="http://schemas.openxmlformats.org/presentationml/2006/main">
+  <p:cSld>
     <p:bg>
       <p:bgPr>
         <a:solidFill>
@@ -16302,7 +16603,7 @@
 </p:sld>
 </file>
 
-<file path=ppt/slides/slide7.xml><?xml version="1.0" encoding="utf-8"?>
+<file path=ppt/slides/slide8.xml><?xml version="1.0" encoding="utf-8"?>
 <p:sld xmlns:a="http://schemas.openxmlformats.org/drawingml/2006/main" xmlns:r="http://schemas.openxmlformats.org/officeDocument/2006/relationships" xmlns:p="http://schemas.openxmlformats.org/presentationml/2006/main">
   <p:cSld>
     <p:spTree>
@@ -16701,7 +17002,7 @@
 </p:sld>
 </file>
 
-<file path=ppt/slides/slide8.xml><?xml version="1.0" encoding="utf-8"?>
+<file path=ppt/slides/slide9.xml><?xml version="1.0" encoding="utf-8"?>
 <p:sld xmlns:a="http://schemas.openxmlformats.org/drawingml/2006/main" xmlns:r="http://schemas.openxmlformats.org/officeDocument/2006/relationships" xmlns:p="http://schemas.openxmlformats.org/presentationml/2006/main">
   <p:cSld>
     <p:spTree>
@@ -16883,113 +17184,6 @@
     <p:extLst>
       <p:ext uri="{BB962C8B-B14F-4D97-AF65-F5344CB8AC3E}">
         <p14:creationId xmlns:p14="http://schemas.microsoft.com/office/powerpoint/2010/main" val="2471593820"/>
-      </p:ext>
-    </p:extLst>
-  </p:cSld>
-  <p:clrMapOvr>
-    <a:masterClrMapping/>
-  </p:clrMapOvr>
-</p:sld>
-</file>
-
-<file path=ppt/slides/slide9.xml><?xml version="1.0" encoding="utf-8"?>
-<p:sld xmlns:a="http://schemas.openxmlformats.org/drawingml/2006/main" xmlns:r="http://schemas.openxmlformats.org/officeDocument/2006/relationships" xmlns:p="http://schemas.openxmlformats.org/presentationml/2006/main">
-  <p:cSld>
-    <p:spTree>
-      <p:nvGrpSpPr>
-        <p:cNvPr id="1" name=""/>
-        <p:cNvGrpSpPr/>
-        <p:nvPr/>
-      </p:nvGrpSpPr>
-      <p:grpSpPr>
-        <a:xfrm>
-          <a:off x="0" y="0"/>
-          <a:ext cx="0" cy="0"/>
-          <a:chOff x="0" y="0"/>
-          <a:chExt cx="0" cy="0"/>
-        </a:xfrm>
-      </p:grpSpPr>
-      <p:sp>
-        <p:nvSpPr>
-          <p:cNvPr id="2" name="Title 1">
-            <a:extLst>
-              <a:ext uri="{FF2B5EF4-FFF2-40B4-BE49-F238E27FC236}">
-                <a16:creationId xmlns:a16="http://schemas.microsoft.com/office/drawing/2014/main" id="{B29A5194-BDC9-0D50-0D4E-2151E9E71FC9}"/>
-              </a:ext>
-            </a:extLst>
-          </p:cNvPr>
-          <p:cNvSpPr>
-            <a:spLocks noGrp="1"/>
-          </p:cNvSpPr>
-          <p:nvPr>
-            <p:ph type="title"/>
-          </p:nvPr>
-        </p:nvSpPr>
-        <p:spPr/>
-        <p:txBody>
-          <a:bodyPr/>
-          <a:lstStyle/>
-          <a:p>
-            <a:r>
-              <a:rPr lang="en-US" dirty="0"/>
-              <a:t>Next Phase</a:t>
-            </a:r>
-          </a:p>
-        </p:txBody>
-      </p:sp>
-      <p:sp>
-        <p:nvSpPr>
-          <p:cNvPr id="3" name="Content Placeholder 2">
-            <a:extLst>
-              <a:ext uri="{FF2B5EF4-FFF2-40B4-BE49-F238E27FC236}">
-                <a16:creationId xmlns:a16="http://schemas.microsoft.com/office/drawing/2014/main" id="{6315E1F8-5F77-09B3-2639-1A827A3C790F}"/>
-              </a:ext>
-            </a:extLst>
-          </p:cNvPr>
-          <p:cNvSpPr>
-            <a:spLocks noGrp="1"/>
-          </p:cNvSpPr>
-          <p:nvPr>
-            <p:ph idx="1"/>
-          </p:nvPr>
-        </p:nvSpPr>
-        <p:spPr/>
-        <p:txBody>
-          <a:bodyPr/>
-          <a:lstStyle/>
-          <a:p>
-            <a:r>
-              <a:rPr lang="en-US" dirty="0"/>
-              <a:t>Fully functional flight booking system implementing all business rules</a:t>
-            </a:r>
-          </a:p>
-          <a:p>
-            <a:r>
-              <a:rPr lang="en-US" dirty="0"/>
-              <a:t>Add some users such as (Front Desk Staff, Loyal Customer, Flight Manager)</a:t>
-            </a:r>
-          </a:p>
-          <a:p>
-            <a:r>
-              <a:rPr lang="en-US" dirty="0"/>
-              <a:t>Ticket Generator</a:t>
-            </a:r>
-          </a:p>
-          <a:p>
-            <a:r>
-              <a:rPr lang="en-US" dirty="0"/>
-              <a:t>Payment Processing Simulation</a:t>
-            </a:r>
-          </a:p>
-          <a:p>
-            <a:endParaRPr lang="en-US" dirty="0"/>
-          </a:p>
-        </p:txBody>
-      </p:sp>
-    </p:spTree>
-    <p:extLst>
-      <p:ext uri="{BB962C8B-B14F-4D97-AF65-F5344CB8AC3E}">
-        <p14:creationId xmlns:p14="http://schemas.microsoft.com/office/powerpoint/2010/main" val="1331980665"/>
       </p:ext>
     </p:extLst>
   </p:cSld>
